--- a/m1/diapositivos/sessao-10-m1-f11.pptx
+++ b/m1/diapositivos/sessao-10-m1-f11.pptx
@@ -1911,7 +1911,75 @@
                 <a:ea typeface="Arial" pitchFamily="34" charset="-122"/>
                 <a:cs typeface="Arial" pitchFamily="34" charset="-120"/>
               </a:rPr>
-              <a:t>Na gramática, três gestos: nomear o processo (mare &gt; mar, apócope), encontrar de quem depende o complemento, classificar a coordenada pelo valor da conjunção.</a:t>
+              <a:t>Na gramática, três gestos: nomear o processo (</a:t>
+            </a:r>
+            <a:pPr indent="0" marL="0">
+              <a:lnSpc>
+                <a:spcPct val="105000"/>
+              </a:lnSpc>
+              <a:buNone/>
+            </a:pPr>
+            <a:r>
+              <a:rPr lang="en-US" sz="2200" i="1" dirty="0">
+                <a:solidFill>
+                  <a:srgbClr val="F2F0EA"/>
+                </a:solidFill>
+                <a:latin typeface="Arial" pitchFamily="34" charset="0"/>
+                <a:ea typeface="Arial" pitchFamily="34" charset="-122"/>
+                <a:cs typeface="Arial" pitchFamily="34" charset="-120"/>
+              </a:rPr>
+              <a:t>mare</a:t>
+            </a:r>
+            <a:pPr indent="0" marL="0">
+              <a:lnSpc>
+                <a:spcPct val="105000"/>
+              </a:lnSpc>
+              <a:buNone/>
+            </a:pPr>
+            <a:r>
+              <a:rPr lang="en-US" sz="2200" dirty="0">
+                <a:solidFill>
+                  <a:srgbClr val="F2F0EA"/>
+                </a:solidFill>
+                <a:latin typeface="Arial" pitchFamily="34" charset="0"/>
+                <a:ea typeface="Arial" pitchFamily="34" charset="-122"/>
+                <a:cs typeface="Arial" pitchFamily="34" charset="-120"/>
+              </a:rPr>
+              <a:t> &gt; </a:t>
+            </a:r>
+            <a:pPr indent="0" marL="0">
+              <a:lnSpc>
+                <a:spcPct val="105000"/>
+              </a:lnSpc>
+              <a:buNone/>
+            </a:pPr>
+            <a:r>
+              <a:rPr lang="en-US" sz="2200" i="1" dirty="0">
+                <a:solidFill>
+                  <a:srgbClr val="F2F0EA"/>
+                </a:solidFill>
+                <a:latin typeface="Arial" pitchFamily="34" charset="0"/>
+                <a:ea typeface="Arial" pitchFamily="34" charset="-122"/>
+                <a:cs typeface="Arial" pitchFamily="34" charset="-120"/>
+              </a:rPr>
+              <a:t>mar</a:t>
+            </a:r>
+            <a:pPr indent="0" marL="0">
+              <a:lnSpc>
+                <a:spcPct val="105000"/>
+              </a:lnSpc>
+              <a:buNone/>
+            </a:pPr>
+            <a:r>
+              <a:rPr lang="en-US" sz="2200" dirty="0">
+                <a:solidFill>
+                  <a:srgbClr val="F2F0EA"/>
+                </a:solidFill>
+                <a:latin typeface="Arial" pitchFamily="34" charset="0"/>
+                <a:ea typeface="Arial" pitchFamily="34" charset="-122"/>
+                <a:cs typeface="Arial" pitchFamily="34" charset="-120"/>
+              </a:rPr>
+              <a:t>, apócope), encontrar de quem depende o complemento, classificar a coordenada pelo valor da conjunção.</a:t>
             </a:r>
             <a:endParaRPr lang="en-US" sz="2200" dirty="0"/>
           </a:p>
@@ -3942,7 +4010,35 @@
                 <a:ea typeface="Arial" pitchFamily="34" charset="-122"/>
                 <a:cs typeface="Arial" pitchFamily="34" charset="-120"/>
               </a:rPr>
-              <a:t>Fernão Lopes, Crónica de D. João I (edição de 1897), cap. CXLVIII (excerto).</a:t>
+              <a:t>Fernão Lopes, </a:t>
+            </a:r>
+            <a:pPr indent="0" marL="0">
+              <a:buNone/>
+            </a:pPr>
+            <a:r>
+              <a:rPr lang="en-US" sz="1200" i="1" dirty="0">
+                <a:solidFill>
+                  <a:srgbClr val="A9A79F"/>
+                </a:solidFill>
+                <a:latin typeface="Arial" pitchFamily="34" charset="0"/>
+                <a:ea typeface="Arial" pitchFamily="34" charset="-122"/>
+                <a:cs typeface="Arial" pitchFamily="34" charset="-120"/>
+              </a:rPr>
+              <a:t>Crónica de D. João I</a:t>
+            </a:r>
+            <a:pPr indent="0" marL="0">
+              <a:buNone/>
+            </a:pPr>
+            <a:r>
+              <a:rPr lang="en-US" sz="1200" dirty="0">
+                <a:solidFill>
+                  <a:srgbClr val="A9A79F"/>
+                </a:solidFill>
+                <a:latin typeface="Arial" pitchFamily="34" charset="0"/>
+                <a:ea typeface="Arial" pitchFamily="34" charset="-122"/>
+                <a:cs typeface="Arial" pitchFamily="34" charset="-120"/>
+              </a:rPr>
+              <a:t> (edição de 1897), cap. CXLVIII (excerto).</a:t>
             </a:r>
             <a:endParaRPr lang="en-US" sz="1200" dirty="0"/>
           </a:p>
@@ -4874,13 +4970,10 @@
               <a:lnSpc>
                 <a:spcPct val="120000"/>
               </a:lnSpc>
-              <a:spcAft>
-                <a:spcPts val="1000"/>
-              </a:spcAft>
-              <a:buNone/>
-            </a:pPr>
-            <a:r>
-              <a:rPr lang="en-US" sz="2300" dirty="0">
+              <a:buNone/>
+            </a:pPr>
+            <a:r>
+              <a:rPr lang="en-US" sz="2300" b="1" dirty="0">
                 <a:solidFill>
                   <a:srgbClr val="F2F0EA"/>
                 </a:solidFill>
@@ -4888,18 +4981,12 @@
                 <a:ea typeface="Georgia" pitchFamily="34" charset="-122"/>
                 <a:cs typeface="Georgia" pitchFamily="34" charset="-120"/>
               </a:rPr>
-              <a:t>Paralelismo: estrofes seguidas dizem quase o mesmo, com uma ou duas palavras trocadas.</a:t>
-            </a:r>
-            <a:endParaRPr lang="en-US" sz="2300" dirty="0"/>
-          </a:p>
-          <a:p>
+              <a:t>Paralelismo</a:t>
+            </a:r>
             <a:pPr indent="0" marL="0">
               <a:lnSpc>
                 <a:spcPct val="120000"/>
               </a:lnSpc>
-              <a:spcAft>
-                <a:spcPts val="1000"/>
-              </a:spcAft>
               <a:buNone/>
             </a:pPr>
             <a:r>
@@ -4911,22 +4998,16 @@
                 <a:ea typeface="Georgia" pitchFamily="34" charset="-122"/>
                 <a:cs typeface="Georgia" pitchFamily="34" charset="-120"/>
               </a:rPr>
-              <a:t>Leixa-pren: o segundo verso de uma estrofe passa a primeiro de uma estrofe seguinte.</a:t>
-            </a:r>
-            <a:endParaRPr lang="en-US" sz="2300" dirty="0"/>
-          </a:p>
-          <a:p>
+              <a:t>: estrofes seguidas dizem quase o mesmo, com uma ou duas palavras trocadas. </a:t>
+            </a:r>
             <a:pPr indent="0" marL="0">
               <a:lnSpc>
                 <a:spcPct val="120000"/>
               </a:lnSpc>
-              <a:spcAft>
-                <a:spcPts val="1000"/>
-              </a:spcAft>
-              <a:buNone/>
-            </a:pPr>
-            <a:r>
-              <a:rPr lang="en-US" sz="2300" dirty="0">
+              <a:buNone/>
+            </a:pPr>
+            <a:r>
+              <a:rPr lang="en-US" sz="2300" b="1" dirty="0">
                 <a:solidFill>
                   <a:srgbClr val="F2F0EA"/>
                 </a:solidFill>
@@ -4934,18 +5015,12 @@
                 <a:ea typeface="Georgia" pitchFamily="34" charset="-122"/>
                 <a:cs typeface="Georgia" pitchFamily="34" charset="-120"/>
               </a:rPr>
-              <a:t>Visualismo: fazer ver, com som, cor e movimento.</a:t>
-            </a:r>
-            <a:endParaRPr lang="en-US" sz="2300" dirty="0"/>
-          </a:p>
-          <a:p>
+              <a:t>Leixa-pren</a:t>
+            </a:r>
             <a:pPr indent="0" marL="0">
               <a:lnSpc>
                 <a:spcPct val="120000"/>
               </a:lnSpc>
-              <a:spcAft>
-                <a:spcPts val="1000"/>
-              </a:spcAft>
               <a:buNone/>
             </a:pPr>
             <a:r>
@@ -4957,7 +5032,75 @@
                 <a:ea typeface="Georgia" pitchFamily="34" charset="-122"/>
                 <a:cs typeface="Georgia" pitchFamily="34" charset="-120"/>
               </a:rPr>
-              <a:t>Personagem coletiva: um grupo que age como uma só figura.</a:t>
+              <a:t>: o segundo verso de uma estrofe passa a primeiro de uma estrofe seguinte. </a:t>
+            </a:r>
+            <a:pPr indent="0" marL="0">
+              <a:lnSpc>
+                <a:spcPct val="120000"/>
+              </a:lnSpc>
+              <a:buNone/>
+            </a:pPr>
+            <a:r>
+              <a:rPr lang="en-US" sz="2300" b="1" dirty="0">
+                <a:solidFill>
+                  <a:srgbClr val="F2F0EA"/>
+                </a:solidFill>
+                <a:latin typeface="Georgia" pitchFamily="34" charset="0"/>
+                <a:ea typeface="Georgia" pitchFamily="34" charset="-122"/>
+                <a:cs typeface="Georgia" pitchFamily="34" charset="-120"/>
+              </a:rPr>
+              <a:t>Visualismo</a:t>
+            </a:r>
+            <a:pPr indent="0" marL="0">
+              <a:lnSpc>
+                <a:spcPct val="120000"/>
+              </a:lnSpc>
+              <a:buNone/>
+            </a:pPr>
+            <a:r>
+              <a:rPr lang="en-US" sz="2300" dirty="0">
+                <a:solidFill>
+                  <a:srgbClr val="F2F0EA"/>
+                </a:solidFill>
+                <a:latin typeface="Georgia" pitchFamily="34" charset="0"/>
+                <a:ea typeface="Georgia" pitchFamily="34" charset="-122"/>
+                <a:cs typeface="Georgia" pitchFamily="34" charset="-120"/>
+              </a:rPr>
+              <a:t>: fazer ver, com som, cor e movimento. </a:t>
+            </a:r>
+            <a:pPr indent="0" marL="0">
+              <a:lnSpc>
+                <a:spcPct val="120000"/>
+              </a:lnSpc>
+              <a:buNone/>
+            </a:pPr>
+            <a:r>
+              <a:rPr lang="en-US" sz="2300" b="1" dirty="0">
+                <a:solidFill>
+                  <a:srgbClr val="F2F0EA"/>
+                </a:solidFill>
+                <a:latin typeface="Georgia" pitchFamily="34" charset="0"/>
+                <a:ea typeface="Georgia" pitchFamily="34" charset="-122"/>
+                <a:cs typeface="Georgia" pitchFamily="34" charset="-120"/>
+              </a:rPr>
+              <a:t>Personagem coletiva</a:t>
+            </a:r>
+            <a:pPr indent="0" marL="0">
+              <a:lnSpc>
+                <a:spcPct val="120000"/>
+              </a:lnSpc>
+              <a:buNone/>
+            </a:pPr>
+            <a:r>
+              <a:rPr lang="en-US" sz="2300" dirty="0">
+                <a:solidFill>
+                  <a:srgbClr val="F2F0EA"/>
+                </a:solidFill>
+                <a:latin typeface="Georgia" pitchFamily="34" charset="0"/>
+                <a:ea typeface="Georgia" pitchFamily="34" charset="-122"/>
+                <a:cs typeface="Georgia" pitchFamily="34" charset="-120"/>
+              </a:rPr>
+              <a:t>: um grupo que age como uma só figura.</a:t>
             </a:r>
             <a:endParaRPr lang="en-US" sz="2300" dirty="0"/>
           </a:p>
@@ -5280,7 +5423,47 @@
                 <a:ea typeface="Georgia" pitchFamily="34" charset="-122"/>
                 <a:cs typeface="Georgia" pitchFamily="34" charset="-120"/>
               </a:rPr>
-              <a:t>Tema provável: a repetição nas canções, das cantigas de amigo à música de hoje.</a:t>
+              <a:t>Tema provável: </a:t>
+            </a:r>
+            <a:pPr indent="0" marL="0">
+              <a:lnSpc>
+                <a:spcPct val="120000"/>
+              </a:lnSpc>
+              <a:spcAft>
+                <a:spcPts val="1000"/>
+              </a:spcAft>
+              <a:buNone/>
+            </a:pPr>
+            <a:r>
+              <a:rPr lang="en-US" sz="2300" b="1" dirty="0">
+                <a:solidFill>
+                  <a:srgbClr val="F2F0EA"/>
+                </a:solidFill>
+                <a:latin typeface="Georgia" pitchFamily="34" charset="0"/>
+                <a:ea typeface="Georgia" pitchFamily="34" charset="-122"/>
+                <a:cs typeface="Georgia" pitchFamily="34" charset="-120"/>
+              </a:rPr>
+              <a:t>a repetição nas canções, das cantigas de amigo à música de hoje</a:t>
+            </a:r>
+            <a:pPr indent="0" marL="0">
+              <a:lnSpc>
+                <a:spcPct val="120000"/>
+              </a:lnSpc>
+              <a:spcAft>
+                <a:spcPts val="1000"/>
+              </a:spcAft>
+              <a:buNone/>
+            </a:pPr>
+            <a:r>
+              <a:rPr lang="en-US" sz="2300" dirty="0">
+                <a:solidFill>
+                  <a:srgbClr val="F2F0EA"/>
+                </a:solidFill>
+                <a:latin typeface="Georgia" pitchFamily="34" charset="0"/>
+                <a:ea typeface="Georgia" pitchFamily="34" charset="-122"/>
+                <a:cs typeface="Georgia" pitchFamily="34" charset="-120"/>
+              </a:rPr>
+              <a:t>.</a:t>
             </a:r>
             <a:endParaRPr lang="en-US" sz="2300" dirty="0"/>
           </a:p>
